--- a/SAM_QIP_Roadmap.pptx
+++ b/SAM_QIP_Roadmap.pptx
@@ -4335,7 +4335,7 @@
                   </a:extLst>
                 </a:hlinkClick>
               </a:rPr>
-              <a:t>aimqa.github.io/SAMQIP</a:t>
+              <a:t>aimqa.github.io/SAM-QI-diagram-tool</a:t>
             </a:r>
             <a:endParaRPr lang="en-US" sz="950" dirty="0"/>
           </a:p>
@@ -5861,7 +5861,7 @@
                   </a:extLst>
                 </a:hlinkClick>
               </a:rPr>
-              <a:t>aimqa.github.io/SAMQIP</a:t>
+              <a:t>aimqa.github.io/SAM-QI-diagram-tool</a:t>
             </a:r>
             <a:pPr indent="0" marL="0">
               <a:buNone/>
@@ -6778,7 +6778,7 @@
                   </a:extLst>
                 </a:hlinkClick>
               </a:rPr>
-              <a:t>Draw it online → aimqa.github.io/SAMQIP</a:t>
+              <a:t>Draw it online → aimqa.github.io/SAM-QI-diagram-tool</a:t>
             </a:r>
             <a:pPr indent="0" marL="0">
               <a:buNone/>
@@ -23275,7 +23275,7 @@
                   </a:extLst>
                 </a:hlinkClick>
               </a:rPr>
-              <a:t>Draw both online  →  aimqa.github.io/SAMQIP</a:t>
+              <a:t>Draw both online  →  aimqa.github.io/SAM-QI-diagram-tool</a:t>
             </a:r>
             <a:endParaRPr lang="en-US" sz="1050" dirty="0"/>
           </a:p>
